--- a/Plover1.pptx
+++ b/Plover1.pptx
@@ -136,6 +136,35 @@
 </p:cmAuthorLst>
 </file>
 
+<file path=ppt/changesInfos/changesInfo1.xml><?xml version="1.0" encoding="utf-8"?>
+<pc:chgInfo xmlns:a="http://schemas.openxmlformats.org/drawingml/2006/main" xmlns:r="http://schemas.openxmlformats.org/officeDocument/2006/relationships" xmlns:ac="http://schemas.microsoft.com/office/drawing/2013/main/command" xmlns:pc="http://schemas.microsoft.com/office/powerpoint/2013/main/command">
+  <pc:docChgLst>
+    <pc:chgData name="Kevin T Shoemaker" userId="dc9db046-f2e9-42dd-9007-71360e40fbdc" providerId="ADAL" clId="{8AE16E48-D74C-4474-A9D4-DFE0C78D0CE2}"/>
+    <pc:docChg chg="modSld">
+      <pc:chgData name="Kevin T Shoemaker" userId="dc9db046-f2e9-42dd-9007-71360e40fbdc" providerId="ADAL" clId="{8AE16E48-D74C-4474-A9D4-DFE0C78D0CE2}" dt="2026-03-31T02:45:34.931" v="45" actId="20577"/>
+      <pc:docMkLst>
+        <pc:docMk/>
+      </pc:docMkLst>
+      <pc:sldChg chg="modSp mod">
+        <pc:chgData name="Kevin T Shoemaker" userId="dc9db046-f2e9-42dd-9007-71360e40fbdc" providerId="ADAL" clId="{8AE16E48-D74C-4474-A9D4-DFE0C78D0CE2}" dt="2026-03-31T02:45:34.931" v="45" actId="20577"/>
+        <pc:sldMkLst>
+          <pc:docMk/>
+          <pc:sldMk cId="1218643510" sldId="506"/>
+        </pc:sldMkLst>
+        <pc:spChg chg="mod">
+          <ac:chgData name="Kevin T Shoemaker" userId="dc9db046-f2e9-42dd-9007-71360e40fbdc" providerId="ADAL" clId="{8AE16E48-D74C-4474-A9D4-DFE0C78D0CE2}" dt="2026-03-31T02:45:34.931" v="45" actId="20577"/>
+          <ac:spMkLst>
+            <pc:docMk/>
+            <pc:sldMk cId="1218643510" sldId="506"/>
+            <ac:spMk id="2" creationId="{06857410-43FD-49AA-851D-17E13CBA9A69}"/>
+          </ac:spMkLst>
+        </pc:spChg>
+      </pc:sldChg>
+    </pc:docChg>
+  </pc:docChgLst>
+</pc:chgInfo>
+</file>
+
 <file path=ppt/notesMasters/notesMaster1.xml><?xml version="1.0" encoding="utf-8"?>
 <p:notesMaster xmlns:a="http://schemas.openxmlformats.org/drawingml/2006/main" xmlns:r="http://schemas.openxmlformats.org/officeDocument/2006/relationships" xmlns:p="http://schemas.openxmlformats.org/presentationml/2006/main">
   <p:cSld>
@@ -218,7 +247,7 @@
           <a:p>
             <a:fld id="{A78133E2-FBBC-4C61-A5C0-7062D0A259CE}" type="datetimeFigureOut">
               <a:rPr lang="en-US" smtClean="0"/>
-              <a:t>3/27/2026</a:t>
+              <a:t>3/30/2026</a:t>
             </a:fld>
             <a:endParaRPr lang="en-US"/>
           </a:p>
@@ -827,7 +856,7 @@
           <a:p>
             <a:fld id="{580C285D-C318-479F-93A6-892FDA74F1A2}" type="datetimeFigureOut">
               <a:rPr lang="en-US" smtClean="0"/>
-              <a:t>3/27/2026</a:t>
+              <a:t>3/30/2026</a:t>
             </a:fld>
             <a:endParaRPr lang="en-US"/>
           </a:p>
@@ -995,7 +1024,7 @@
           <a:p>
             <a:fld id="{580C285D-C318-479F-93A6-892FDA74F1A2}" type="datetimeFigureOut">
               <a:rPr lang="en-US" smtClean="0"/>
-              <a:t>3/27/2026</a:t>
+              <a:t>3/30/2026</a:t>
             </a:fld>
             <a:endParaRPr lang="en-US"/>
           </a:p>
@@ -1173,7 +1202,7 @@
           <a:p>
             <a:fld id="{580C285D-C318-479F-93A6-892FDA74F1A2}" type="datetimeFigureOut">
               <a:rPr lang="en-US" smtClean="0"/>
-              <a:t>3/27/2026</a:t>
+              <a:t>3/30/2026</a:t>
             </a:fld>
             <a:endParaRPr lang="en-US"/>
           </a:p>
@@ -1341,7 +1370,7 @@
           <a:p>
             <a:fld id="{580C285D-C318-479F-93A6-892FDA74F1A2}" type="datetimeFigureOut">
               <a:rPr lang="en-US" smtClean="0"/>
-              <a:t>3/27/2026</a:t>
+              <a:t>3/30/2026</a:t>
             </a:fld>
             <a:endParaRPr lang="en-US"/>
           </a:p>
@@ -1586,7 +1615,7 @@
           <a:p>
             <a:fld id="{580C285D-C318-479F-93A6-892FDA74F1A2}" type="datetimeFigureOut">
               <a:rPr lang="en-US" smtClean="0"/>
-              <a:t>3/27/2026</a:t>
+              <a:t>3/30/2026</a:t>
             </a:fld>
             <a:endParaRPr lang="en-US"/>
           </a:p>
@@ -1815,7 +1844,7 @@
           <a:p>
             <a:fld id="{580C285D-C318-479F-93A6-892FDA74F1A2}" type="datetimeFigureOut">
               <a:rPr lang="en-US" smtClean="0"/>
-              <a:t>3/27/2026</a:t>
+              <a:t>3/30/2026</a:t>
             </a:fld>
             <a:endParaRPr lang="en-US"/>
           </a:p>
@@ -2179,7 +2208,7 @@
           <a:p>
             <a:fld id="{580C285D-C318-479F-93A6-892FDA74F1A2}" type="datetimeFigureOut">
               <a:rPr lang="en-US" smtClean="0"/>
-              <a:t>3/27/2026</a:t>
+              <a:t>3/30/2026</a:t>
             </a:fld>
             <a:endParaRPr lang="en-US"/>
           </a:p>
@@ -2296,7 +2325,7 @@
           <a:p>
             <a:fld id="{580C285D-C318-479F-93A6-892FDA74F1A2}" type="datetimeFigureOut">
               <a:rPr lang="en-US" smtClean="0"/>
-              <a:t>3/27/2026</a:t>
+              <a:t>3/30/2026</a:t>
             </a:fld>
             <a:endParaRPr lang="en-US"/>
           </a:p>
@@ -2391,7 +2420,7 @@
           <a:p>
             <a:fld id="{580C285D-C318-479F-93A6-892FDA74F1A2}" type="datetimeFigureOut">
               <a:rPr lang="en-US" smtClean="0"/>
-              <a:t>3/27/2026</a:t>
+              <a:t>3/30/2026</a:t>
             </a:fld>
             <a:endParaRPr lang="en-US"/>
           </a:p>
@@ -2666,7 +2695,7 @@
           <a:p>
             <a:fld id="{580C285D-C318-479F-93A6-892FDA74F1A2}" type="datetimeFigureOut">
               <a:rPr lang="en-US" smtClean="0"/>
-              <a:t>3/27/2026</a:t>
+              <a:t>3/30/2026</a:t>
             </a:fld>
             <a:endParaRPr lang="en-US"/>
           </a:p>
@@ -2918,7 +2947,7 @@
           <a:p>
             <a:fld id="{580C285D-C318-479F-93A6-892FDA74F1A2}" type="datetimeFigureOut">
               <a:rPr lang="en-US" smtClean="0"/>
-              <a:t>3/27/2026</a:t>
+              <a:t>3/30/2026</a:t>
             </a:fld>
             <a:endParaRPr lang="en-US"/>
           </a:p>
@@ -3129,7 +3158,7 @@
           <a:p>
             <a:fld id="{580C285D-C318-479F-93A6-892FDA74F1A2}" type="datetimeFigureOut">
               <a:rPr lang="en-US" smtClean="0"/>
-              <a:t>3/27/2026</a:t>
+              <a:t>3/30/2026</a:t>
             </a:fld>
             <a:endParaRPr lang="en-US"/>
           </a:p>
@@ -4769,15 +4798,7 @@
             </a:r>
             <a:r>
               <a:rPr lang="en-US" dirty="0"/>
-              <a:t> breaching may be anywhere from very low (e.g., 5%) to nearly 50%. Nest survival for unprotected nests may be anywhere from 30% </a:t>
-            </a:r>
-            <a:r>
-              <a:rPr lang="en-US"/>
-              <a:t>to 60</a:t>
-            </a:r>
-            <a:r>
-              <a:rPr lang="en-US" dirty="0"/>
-              <a:t>%.</a:t>
+              <a:t> breaching may be anywhere from very low (e.g., 5%) to nearly 50%. Nest survival for unprotected nests may be anywhere from 30% to 60%.</a:t>
             </a:r>
           </a:p>
           <a:p>

--- a/Plover1.pptx
+++ b/Plover1.pptx
@@ -141,12 +141,12 @@
   <pc:docChgLst>
     <pc:chgData name="Kevin T Shoemaker" userId="dc9db046-f2e9-42dd-9007-71360e40fbdc" providerId="ADAL" clId="{8AE16E48-D74C-4474-A9D4-DFE0C78D0CE2}"/>
     <pc:docChg chg="modSld">
-      <pc:chgData name="Kevin T Shoemaker" userId="dc9db046-f2e9-42dd-9007-71360e40fbdc" providerId="ADAL" clId="{8AE16E48-D74C-4474-A9D4-DFE0C78D0CE2}" dt="2026-03-31T02:45:34.931" v="45" actId="20577"/>
+      <pc:chgData name="Kevin T Shoemaker" userId="dc9db046-f2e9-42dd-9007-71360e40fbdc" providerId="ADAL" clId="{8AE16E48-D74C-4474-A9D4-DFE0C78D0CE2}" dt="2026-04-02T04:37:56.755" v="47" actId="20577"/>
       <pc:docMkLst>
         <pc:docMk/>
       </pc:docMkLst>
       <pc:sldChg chg="modSp mod">
-        <pc:chgData name="Kevin T Shoemaker" userId="dc9db046-f2e9-42dd-9007-71360e40fbdc" providerId="ADAL" clId="{8AE16E48-D74C-4474-A9D4-DFE0C78D0CE2}" dt="2026-03-31T02:45:34.931" v="45" actId="20577"/>
+        <pc:chgData name="Kevin T Shoemaker" userId="dc9db046-f2e9-42dd-9007-71360e40fbdc" providerId="ADAL" clId="{8AE16E48-D74C-4474-A9D4-DFE0C78D0CE2}" dt="2026-04-02T04:37:56.755" v="47" actId="20577"/>
         <pc:sldMkLst>
           <pc:docMk/>
           <pc:sldMk cId="1218643510" sldId="506"/>
@@ -157,6 +157,14 @@
             <pc:docMk/>
             <pc:sldMk cId="1218643510" sldId="506"/>
             <ac:spMk id="2" creationId="{06857410-43FD-49AA-851D-17E13CBA9A69}"/>
+          </ac:spMkLst>
+        </pc:spChg>
+        <pc:spChg chg="mod">
+          <ac:chgData name="Kevin T Shoemaker" userId="dc9db046-f2e9-42dd-9007-71360e40fbdc" providerId="ADAL" clId="{8AE16E48-D74C-4474-A9D4-DFE0C78D0CE2}" dt="2026-04-02T04:37:56.755" v="47" actId="20577"/>
+          <ac:spMkLst>
+            <pc:docMk/>
+            <pc:sldMk cId="1218643510" sldId="506"/>
+            <ac:spMk id="3" creationId="{D6F2514B-B395-4931-8F79-F934379C3425}"/>
           </ac:spMkLst>
         </pc:spChg>
       </pc:sldChg>
@@ -247,7 +255,7 @@
           <a:p>
             <a:fld id="{A78133E2-FBBC-4C61-A5C0-7062D0A259CE}" type="datetimeFigureOut">
               <a:rPr lang="en-US" smtClean="0"/>
-              <a:t>3/30/2026</a:t>
+              <a:t>4/1/2026</a:t>
             </a:fld>
             <a:endParaRPr lang="en-US"/>
           </a:p>
@@ -856,7 +864,7 @@
           <a:p>
             <a:fld id="{580C285D-C318-479F-93A6-892FDA74F1A2}" type="datetimeFigureOut">
               <a:rPr lang="en-US" smtClean="0"/>
-              <a:t>3/30/2026</a:t>
+              <a:t>4/1/2026</a:t>
             </a:fld>
             <a:endParaRPr lang="en-US"/>
           </a:p>
@@ -1024,7 +1032,7 @@
           <a:p>
             <a:fld id="{580C285D-C318-479F-93A6-892FDA74F1A2}" type="datetimeFigureOut">
               <a:rPr lang="en-US" smtClean="0"/>
-              <a:t>3/30/2026</a:t>
+              <a:t>4/1/2026</a:t>
             </a:fld>
             <a:endParaRPr lang="en-US"/>
           </a:p>
@@ -1202,7 +1210,7 @@
           <a:p>
             <a:fld id="{580C285D-C318-479F-93A6-892FDA74F1A2}" type="datetimeFigureOut">
               <a:rPr lang="en-US" smtClean="0"/>
-              <a:t>3/30/2026</a:t>
+              <a:t>4/1/2026</a:t>
             </a:fld>
             <a:endParaRPr lang="en-US"/>
           </a:p>
@@ -1370,7 +1378,7 @@
           <a:p>
             <a:fld id="{580C285D-C318-479F-93A6-892FDA74F1A2}" type="datetimeFigureOut">
               <a:rPr lang="en-US" smtClean="0"/>
-              <a:t>3/30/2026</a:t>
+              <a:t>4/1/2026</a:t>
             </a:fld>
             <a:endParaRPr lang="en-US"/>
           </a:p>
@@ -1615,7 +1623,7 @@
           <a:p>
             <a:fld id="{580C285D-C318-479F-93A6-892FDA74F1A2}" type="datetimeFigureOut">
               <a:rPr lang="en-US" smtClean="0"/>
-              <a:t>3/30/2026</a:t>
+              <a:t>4/1/2026</a:t>
             </a:fld>
             <a:endParaRPr lang="en-US"/>
           </a:p>
@@ -1844,7 +1852,7 @@
           <a:p>
             <a:fld id="{580C285D-C318-479F-93A6-892FDA74F1A2}" type="datetimeFigureOut">
               <a:rPr lang="en-US" smtClean="0"/>
-              <a:t>3/30/2026</a:t>
+              <a:t>4/1/2026</a:t>
             </a:fld>
             <a:endParaRPr lang="en-US"/>
           </a:p>
@@ -2208,7 +2216,7 @@
           <a:p>
             <a:fld id="{580C285D-C318-479F-93A6-892FDA74F1A2}" type="datetimeFigureOut">
               <a:rPr lang="en-US" smtClean="0"/>
-              <a:t>3/30/2026</a:t>
+              <a:t>4/1/2026</a:t>
             </a:fld>
             <a:endParaRPr lang="en-US"/>
           </a:p>
@@ -2325,7 +2333,7 @@
           <a:p>
             <a:fld id="{580C285D-C318-479F-93A6-892FDA74F1A2}" type="datetimeFigureOut">
               <a:rPr lang="en-US" smtClean="0"/>
-              <a:t>3/30/2026</a:t>
+              <a:t>4/1/2026</a:t>
             </a:fld>
             <a:endParaRPr lang="en-US"/>
           </a:p>
@@ -2420,7 +2428,7 @@
           <a:p>
             <a:fld id="{580C285D-C318-479F-93A6-892FDA74F1A2}" type="datetimeFigureOut">
               <a:rPr lang="en-US" smtClean="0"/>
-              <a:t>3/30/2026</a:t>
+              <a:t>4/1/2026</a:t>
             </a:fld>
             <a:endParaRPr lang="en-US"/>
           </a:p>
@@ -2695,7 +2703,7 @@
           <a:p>
             <a:fld id="{580C285D-C318-479F-93A6-892FDA74F1A2}" type="datetimeFigureOut">
               <a:rPr lang="en-US" smtClean="0"/>
-              <a:t>3/30/2026</a:t>
+              <a:t>4/1/2026</a:t>
             </a:fld>
             <a:endParaRPr lang="en-US"/>
           </a:p>
@@ -2947,7 +2955,7 @@
           <a:p>
             <a:fld id="{580C285D-C318-479F-93A6-892FDA74F1A2}" type="datetimeFigureOut">
               <a:rPr lang="en-US" smtClean="0"/>
-              <a:t>3/30/2026</a:t>
+              <a:t>4/1/2026</a:t>
             </a:fld>
             <a:endParaRPr lang="en-US"/>
           </a:p>
@@ -3158,7 +3166,7 @@
           <a:p>
             <a:fld id="{580C285D-C318-479F-93A6-892FDA74F1A2}" type="datetimeFigureOut">
               <a:rPr lang="en-US" smtClean="0"/>
-              <a:t>3/30/2026</a:t>
+              <a:t>4/1/2026</a:t>
             </a:fld>
             <a:endParaRPr lang="en-US"/>
           </a:p>
@@ -4805,8 +4813,13 @@
             <a:pPr lvl="2"/>
             <a:r>
               <a:rPr lang="en-US" dirty="0"/>
-              <a:t>Design a strategy for protecting nests at your refuge that accounts for your uncertainty about nest predation and breaching rates. Can you identify a “safe” strategy </a:t>
-            </a:r>
+              <a:t>Design a strategy for protecting nests at your refuge that accounts for your uncertainty about nest predation and breaching rates. Can you identify a “safe</a:t>
+            </a:r>
+            <a:r>
+              <a:rPr lang="en-US"/>
+              <a:t>” strategy?</a:t>
+            </a:r>
+            <a:endParaRPr lang="en-US" dirty="0"/>
           </a:p>
         </p:txBody>
       </p:sp>

--- a/Plover1.pptx
+++ b/Plover1.pptx
@@ -255,7 +255,7 @@
           <a:p>
             <a:fld id="{A78133E2-FBBC-4C61-A5C0-7062D0A259CE}" type="datetimeFigureOut">
               <a:rPr lang="en-US" smtClean="0"/>
-              <a:t>4/1/2026</a:t>
+              <a:t>4/2/2026</a:t>
             </a:fld>
             <a:endParaRPr lang="en-US"/>
           </a:p>
@@ -864,7 +864,7 @@
           <a:p>
             <a:fld id="{580C285D-C318-479F-93A6-892FDA74F1A2}" type="datetimeFigureOut">
               <a:rPr lang="en-US" smtClean="0"/>
-              <a:t>4/1/2026</a:t>
+              <a:t>4/2/2026</a:t>
             </a:fld>
             <a:endParaRPr lang="en-US"/>
           </a:p>
@@ -1032,7 +1032,7 @@
           <a:p>
             <a:fld id="{580C285D-C318-479F-93A6-892FDA74F1A2}" type="datetimeFigureOut">
               <a:rPr lang="en-US" smtClean="0"/>
-              <a:t>4/1/2026</a:t>
+              <a:t>4/2/2026</a:t>
             </a:fld>
             <a:endParaRPr lang="en-US"/>
           </a:p>
@@ -1210,7 +1210,7 @@
           <a:p>
             <a:fld id="{580C285D-C318-479F-93A6-892FDA74F1A2}" type="datetimeFigureOut">
               <a:rPr lang="en-US" smtClean="0"/>
-              <a:t>4/1/2026</a:t>
+              <a:t>4/2/2026</a:t>
             </a:fld>
             <a:endParaRPr lang="en-US"/>
           </a:p>
@@ -1378,7 +1378,7 @@
           <a:p>
             <a:fld id="{580C285D-C318-479F-93A6-892FDA74F1A2}" type="datetimeFigureOut">
               <a:rPr lang="en-US" smtClean="0"/>
-              <a:t>4/1/2026</a:t>
+              <a:t>4/2/2026</a:t>
             </a:fld>
             <a:endParaRPr lang="en-US"/>
           </a:p>
@@ -1623,7 +1623,7 @@
           <a:p>
             <a:fld id="{580C285D-C318-479F-93A6-892FDA74F1A2}" type="datetimeFigureOut">
               <a:rPr lang="en-US" smtClean="0"/>
-              <a:t>4/1/2026</a:t>
+              <a:t>4/2/2026</a:t>
             </a:fld>
             <a:endParaRPr lang="en-US"/>
           </a:p>
@@ -1852,7 +1852,7 @@
           <a:p>
             <a:fld id="{580C285D-C318-479F-93A6-892FDA74F1A2}" type="datetimeFigureOut">
               <a:rPr lang="en-US" smtClean="0"/>
-              <a:t>4/1/2026</a:t>
+              <a:t>4/2/2026</a:t>
             </a:fld>
             <a:endParaRPr lang="en-US"/>
           </a:p>
@@ -2216,7 +2216,7 @@
           <a:p>
             <a:fld id="{580C285D-C318-479F-93A6-892FDA74F1A2}" type="datetimeFigureOut">
               <a:rPr lang="en-US" smtClean="0"/>
-              <a:t>4/1/2026</a:t>
+              <a:t>4/2/2026</a:t>
             </a:fld>
             <a:endParaRPr lang="en-US"/>
           </a:p>
@@ -2333,7 +2333,7 @@
           <a:p>
             <a:fld id="{580C285D-C318-479F-93A6-892FDA74F1A2}" type="datetimeFigureOut">
               <a:rPr lang="en-US" smtClean="0"/>
-              <a:t>4/1/2026</a:t>
+              <a:t>4/2/2026</a:t>
             </a:fld>
             <a:endParaRPr lang="en-US"/>
           </a:p>
@@ -2428,7 +2428,7 @@
           <a:p>
             <a:fld id="{580C285D-C318-479F-93A6-892FDA74F1A2}" type="datetimeFigureOut">
               <a:rPr lang="en-US" smtClean="0"/>
-              <a:t>4/1/2026</a:t>
+              <a:t>4/2/2026</a:t>
             </a:fld>
             <a:endParaRPr lang="en-US"/>
           </a:p>
@@ -2703,7 +2703,7 @@
           <a:p>
             <a:fld id="{580C285D-C318-479F-93A6-892FDA74F1A2}" type="datetimeFigureOut">
               <a:rPr lang="en-US" smtClean="0"/>
-              <a:t>4/1/2026</a:t>
+              <a:t>4/2/2026</a:t>
             </a:fld>
             <a:endParaRPr lang="en-US"/>
           </a:p>
@@ -2955,7 +2955,7 @@
           <a:p>
             <a:fld id="{580C285D-C318-479F-93A6-892FDA74F1A2}" type="datetimeFigureOut">
               <a:rPr lang="en-US" smtClean="0"/>
-              <a:t>4/1/2026</a:t>
+              <a:t>4/2/2026</a:t>
             </a:fld>
             <a:endParaRPr lang="en-US"/>
           </a:p>
@@ -3166,7 +3166,7 @@
           <a:p>
             <a:fld id="{580C285D-C318-479F-93A6-892FDA74F1A2}" type="datetimeFigureOut">
               <a:rPr lang="en-US" smtClean="0"/>
-              <a:t>4/1/2026</a:t>
+              <a:t>4/2/2026</a:t>
             </a:fld>
             <a:endParaRPr lang="en-US"/>
           </a:p>
@@ -4758,13 +4758,8 @@
             <a:pPr lvl="1"/>
             <a:r>
               <a:rPr lang="en-US" dirty="0"/>
-              <a:t>Try running ‘mini experiments’ by changing the fraction of nests </a:t>
-            </a:r>
-            <a:r>
-              <a:rPr lang="en-US" dirty="0" err="1"/>
-              <a:t>exclosed</a:t>
-            </a:r>
-            <a:endParaRPr lang="en-US" dirty="0"/>
+              <a:t>Try running ‘mini experiments’ by changing the fraction of nests protected</a:t>
+            </a:r>
           </a:p>
           <a:p>
             <a:pPr lvl="2"/>
@@ -4813,13 +4808,8 @@
             <a:pPr lvl="2"/>
             <a:r>
               <a:rPr lang="en-US" dirty="0"/>
-              <a:t>Design a strategy for protecting nests at your refuge that accounts for your uncertainty about nest predation and breaching rates. Can you identify a “safe</a:t>
-            </a:r>
-            <a:r>
-              <a:rPr lang="en-US"/>
-              <a:t>” strategy?</a:t>
-            </a:r>
-            <a:endParaRPr lang="en-US" dirty="0"/>
+              <a:t>Design a strategy for protecting nests at your refuge that accounts for your uncertainty about nest predation and breaching rates. Can you identify a “safe” strategy?</a:t>
+            </a:r>
           </a:p>
         </p:txBody>
       </p:sp>
